--- a/00_Uebersicht/Uebersicht.pptx
+++ b/00_Uebersicht/Uebersicht.pptx
@@ -22,7 +22,7 @@
     <p:sldId id="474" r:id="rId16"/>
     <p:sldId id="466" r:id="rId17"/>
     <p:sldId id="461" r:id="rId18"/>
-    <p:sldId id="463" r:id="rId19"/>
+    <p:sldId id="480" r:id="rId19"/>
     <p:sldId id="462" r:id="rId20"/>
     <p:sldId id="477" r:id="rId21"/>
     <p:sldId id="478" r:id="rId22"/>
@@ -944,7 +944,14 @@
         <a:p>
           <a:r>
             <a:rPr lang="de-CH" sz="1400" noProof="0" dirty="0"/>
-            <a:t>Einarbeitung im Selbststudium</a:t>
+            <a:t>Einarbeitung vor Ort</a:t>
+          </a:r>
+          <a:br>
+            <a:rPr lang="de-CH" sz="1400" noProof="0" dirty="0"/>
+          </a:br>
+          <a:r>
+            <a:rPr lang="de-CH" sz="1400" noProof="0" dirty="0"/>
+            <a:t>(2. Lektion)</a:t>
           </a:r>
         </a:p>
       </dgm:t>
@@ -1052,7 +1059,7 @@
         <a:p>
           <a:r>
             <a:rPr lang="de-CH" sz="1400" noProof="0" dirty="0"/>
-            <a:t>Lernvideos / - texte</a:t>
+            <a:t>Lernvideos / -texte</a:t>
           </a:r>
         </a:p>
       </dgm:t>
@@ -1088,21 +1095,7 @@
         <a:p>
           <a:r>
             <a:rPr lang="de-CH" sz="1400" noProof="0" dirty="0"/>
-            <a:t>Festigung</a:t>
-          </a:r>
-          <a:br>
-            <a:rPr lang="de-CH" sz="1400" noProof="0" dirty="0"/>
-          </a:br>
-          <a:r>
-            <a:rPr lang="de-CH" sz="1400" noProof="0" dirty="0"/>
-            <a:t>vor Ort </a:t>
-          </a:r>
-          <a:br>
-            <a:rPr lang="de-CH" sz="1400" noProof="0" dirty="0"/>
-          </a:br>
-          <a:r>
-            <a:rPr lang="de-CH" sz="1400" noProof="0" dirty="0"/>
-            <a:t>(1. Lektion)</a:t>
+            <a:t>Übungen im Selbststudium</a:t>
           </a:r>
         </a:p>
       </dgm:t>
@@ -1142,7 +1135,7 @@
           </a:pPr>
           <a:r>
             <a:rPr lang="de-CH" sz="1400" noProof="0" dirty="0"/>
-            <a:t>Diskussion der Vertiefung</a:t>
+            <a:t>Übungsblatt</a:t>
           </a:r>
         </a:p>
       </dgm:t>
@@ -1178,7 +1171,7 @@
         <a:p>
           <a:r>
             <a:rPr lang="de-CH" sz="1400" noProof="0" dirty="0"/>
-            <a:t>Übungen vor Ort (2. Lektion) &amp; im Selbststudium</a:t>
+            <a:t>Abschluss vor Ort (2. Lektion)</a:t>
           </a:r>
         </a:p>
       </dgm:t>
@@ -1214,7 +1207,7 @@
         <a:p>
           <a:r>
             <a:rPr lang="de-CH" sz="1400" noProof="0" dirty="0"/>
-            <a:t>Übungsblatt</a:t>
+            <a:t>Diskussion der Vertiefung &amp; Übungen</a:t>
           </a:r>
         </a:p>
       </dgm:t>
@@ -1313,7 +1306,43 @@
         </a:p>
       </dgm:t>
     </dgm:pt>
-    <dgm:pt modelId="{BA8379AE-F6E6-4D08-9170-B6456D995DF5}">
+    <dgm:pt modelId="{1DE6E16F-28D2-A748-8E55-B3CAC282B341}">
+      <dgm:prSet phldrT="[Text]" custT="1"/>
+      <dgm:spPr/>
+      <dgm:t>
+        <a:bodyPr/>
+        <a:lstStyle/>
+        <a:p>
+          <a:r>
+            <a:rPr lang="de-CH" sz="1400" noProof="0" dirty="0"/>
+            <a:t>Fragen klären</a:t>
+          </a:r>
+        </a:p>
+      </dgm:t>
+    </dgm:pt>
+    <dgm:pt modelId="{5E95346A-FC69-F045-949F-8001FCED7AE9}" type="parTrans" cxnId="{90F0DE8E-35FB-7244-8191-D81CB6975FD2}">
+      <dgm:prSet/>
+      <dgm:spPr/>
+      <dgm:t>
+        <a:bodyPr/>
+        <a:lstStyle/>
+        <a:p>
+          <a:endParaRPr lang="de-DE"/>
+        </a:p>
+      </dgm:t>
+    </dgm:pt>
+    <dgm:pt modelId="{2118AECB-56D8-1248-9AFE-F4AB262A1A25}" type="sibTrans" cxnId="{90F0DE8E-35FB-7244-8191-D81CB6975FD2}">
+      <dgm:prSet/>
+      <dgm:spPr/>
+      <dgm:t>
+        <a:bodyPr/>
+        <a:lstStyle/>
+        <a:p>
+          <a:endParaRPr lang="de-DE"/>
+        </a:p>
+      </dgm:t>
+    </dgm:pt>
+    <dgm:pt modelId="{3D0DDCF7-5FF2-584B-82F5-0D23BB180BCC}">
       <dgm:prSet phldrT="[Text]" custT="1"/>
       <dgm:spPr/>
       <dgm:t>
@@ -1326,30 +1355,30 @@
           </a:pPr>
           <a:r>
             <a:rPr lang="de-CH" sz="1400" noProof="0" dirty="0"/>
-            <a:t>Fragen klären</a:t>
+            <a:t>Diskussionsforum</a:t>
           </a:r>
         </a:p>
       </dgm:t>
     </dgm:pt>
-    <dgm:pt modelId="{9FC978EB-2D96-41F1-A0E5-AF38A85E60AF}" type="parTrans" cxnId="{626F6C9F-DE9A-46FD-A1DB-47D21E04D85F}">
+    <dgm:pt modelId="{22CDDA11-5E79-904A-9993-D7ECBF2D0731}" type="parTrans" cxnId="{1D3E6075-DBCC-5645-B787-22F51ED6A265}">
       <dgm:prSet/>
       <dgm:spPr/>
       <dgm:t>
         <a:bodyPr/>
         <a:lstStyle/>
         <a:p>
-          <a:endParaRPr lang="de-CH" sz="2000"/>
+          <a:endParaRPr lang="de-DE"/>
         </a:p>
       </dgm:t>
     </dgm:pt>
-    <dgm:pt modelId="{CACF5E00-885A-4C3A-9C3E-9496F613BD7B}" type="sibTrans" cxnId="{626F6C9F-DE9A-46FD-A1DB-47D21E04D85F}">
+    <dgm:pt modelId="{B6E0254F-E403-4E40-B15C-848D2D01DF75}" type="sibTrans" cxnId="{1D3E6075-DBCC-5645-B787-22F51ED6A265}">
       <dgm:prSet/>
       <dgm:spPr/>
       <dgm:t>
         <a:bodyPr/>
         <a:lstStyle/>
         <a:p>
-          <a:endParaRPr lang="de-CH" sz="2000"/>
+          <a:endParaRPr lang="de-DE"/>
         </a:p>
       </dgm:t>
     </dgm:pt>
@@ -1481,7 +1510,6 @@
     <dgm:cxn modelId="{89ABE60E-05D3-4853-AF96-3A1464D7F5CE}" type="presOf" srcId="{95A02B1F-31EE-406F-8C53-68900251E401}" destId="{FCE97ABA-5AB0-4664-B1DC-F297F6022C4D}" srcOrd="0" destOrd="0" presId="urn:microsoft.com/office/officeart/2009/layout/CircleArrowProcess"/>
     <dgm:cxn modelId="{5231F015-EBE2-472A-96CC-9C3E65073274}" type="presOf" srcId="{31DBE0EC-1F15-4D08-8784-C2B5C84ACB71}" destId="{FD3D0246-7EF7-4BA7-8B8B-77FB80D5EE0E}" srcOrd="0" destOrd="0" presId="urn:microsoft.com/office/officeart/2009/layout/CircleArrowProcess"/>
     <dgm:cxn modelId="{0D971116-B597-49D9-AA9F-CF78CA8D9508}" srcId="{05CFCB54-ED14-4616-BBD6-40E0A0136D62}" destId="{31DBE0EC-1F15-4D08-8784-C2B5C84ACB71}" srcOrd="3" destOrd="0" parTransId="{30356618-970E-4BC2-9506-69347DF666C4}" sibTransId="{DBCBB4B4-0BCD-4E77-99A4-C44443F63C5C}"/>
-    <dgm:cxn modelId="{46FDC616-8367-48F7-AFC1-01686013E026}" type="presOf" srcId="{BA8379AE-F6E6-4D08-9170-B6456D995DF5}" destId="{AA028B1F-CB70-41B5-A801-6597AA3BEAAF}" srcOrd="0" destOrd="1" presId="urn:microsoft.com/office/officeart/2009/layout/CircleArrowProcess"/>
     <dgm:cxn modelId="{D5AB792D-0224-4473-8FBF-67AF480C4E8A}" type="presOf" srcId="{B1405BF2-A2AF-42FE-A07C-A8837982ED35}" destId="{CB2EA870-5B07-406C-9B35-46A28A6980B4}" srcOrd="0" destOrd="1" presId="urn:microsoft.com/office/officeart/2009/layout/CircleArrowProcess"/>
     <dgm:cxn modelId="{C2B43D3E-C0CF-4172-9C3B-EEE82586DEA7}" srcId="{8EF00D03-04AC-4216-A044-3265A5CE2227}" destId="{CD1A197E-EA25-48EB-BA02-73CDF66DC15B}" srcOrd="0" destOrd="0" parTransId="{328FA328-C689-43DC-B374-23D49DF621AA}" sibTransId="{BBD4341D-4029-4551-9C9F-D3EFBE14F51E}"/>
     <dgm:cxn modelId="{F6371146-0CB3-4569-95A9-092DF71097B4}" type="presOf" srcId="{74F890E6-B6CE-4E8F-BAD0-92185ED3D5C9}" destId="{A7FFC5AE-9D38-4FB9-9522-0E1948C9FB81}" srcOrd="0" destOrd="0" presId="urn:microsoft.com/office/officeart/2009/layout/CircleArrowProcess"/>
@@ -1489,16 +1517,19 @@
     <dgm:cxn modelId="{57157756-18DB-4E47-BC21-FC94C7954D1C}" srcId="{05CFCB54-ED14-4616-BBD6-40E0A0136D62}" destId="{74F890E6-B6CE-4E8F-BAD0-92185ED3D5C9}" srcOrd="0" destOrd="0" parTransId="{13122395-DBBD-4182-9031-E670D1C4C58E}" sibTransId="{C2E6632B-5B45-42EF-8C25-C69457894176}"/>
     <dgm:cxn modelId="{8136DE62-0F48-418B-9D9C-1E498530A278}" srcId="{31DBE0EC-1F15-4D08-8784-C2B5C84ACB71}" destId="{95A02B1F-31EE-406F-8C53-68900251E401}" srcOrd="0" destOrd="0" parTransId="{D241EC14-E20D-4655-83D1-821955AD4503}" sibTransId="{5EECBF60-B1CA-46D1-B881-FBFC7F750C18}"/>
     <dgm:cxn modelId="{4096F664-76CE-44F7-9223-77B77472FE41}" srcId="{74F890E6-B6CE-4E8F-BAD0-92185ED3D5C9}" destId="{E070C633-3207-41CF-ACE5-54D91E4F09E9}" srcOrd="1" destOrd="0" parTransId="{7015830A-A846-4E7E-B3B6-6D2E07B4813C}" sibTransId="{691BA9AB-2F20-4A0F-8290-80FD1FBF1F53}"/>
+    <dgm:cxn modelId="{1D3E6075-DBCC-5645-B787-22F51ED6A265}" srcId="{8EF00D03-04AC-4216-A044-3265A5CE2227}" destId="{3D0DDCF7-5FF2-584B-82F5-0D23BB180BCC}" srcOrd="1" destOrd="0" parTransId="{22CDDA11-5E79-904A-9993-D7ECBF2D0731}" sibTransId="{B6E0254F-E403-4E40-B15C-848D2D01DF75}"/>
     <dgm:cxn modelId="{280EB97A-3A21-4BC5-BFE0-EC59AC2C9555}" type="presOf" srcId="{6297AA04-A1A4-4E10-B97D-38E0B31E844F}" destId="{CB2EA870-5B07-406C-9B35-46A28A6980B4}" srcOrd="0" destOrd="0" presId="urn:microsoft.com/office/officeart/2009/layout/CircleArrowProcess"/>
     <dgm:cxn modelId="{18AFBF8A-C5BE-4B6C-A9AF-E4AC6A74E213}" srcId="{05CFCB54-ED14-4616-BBD6-40E0A0136D62}" destId="{8EF00D03-04AC-4216-A044-3265A5CE2227}" srcOrd="2" destOrd="0" parTransId="{C1184E4F-6FAA-4EE8-A5C7-EFA89E824CA4}" sibTransId="{F0895E77-255B-44D3-B3A3-3979DDD721B5}"/>
+    <dgm:cxn modelId="{90F0DE8E-35FB-7244-8191-D81CB6975FD2}" srcId="{31DBE0EC-1F15-4D08-8784-C2B5C84ACB71}" destId="{1DE6E16F-28D2-A748-8E55-B3CAC282B341}" srcOrd="1" destOrd="0" parTransId="{5E95346A-FC69-F045-949F-8001FCED7AE9}" sibTransId="{2118AECB-56D8-1248-9AFE-F4AB262A1A25}"/>
     <dgm:cxn modelId="{D9B4B193-73C4-4C93-9DAF-D8D09459049B}" srcId="{7BC7E6F9-A9A7-45D8-ABDA-A91366CE4F85}" destId="{6297AA04-A1A4-4E10-B97D-38E0B31E844F}" srcOrd="0" destOrd="0" parTransId="{E55EB66F-AB4E-4B57-85F8-6B541F62FAEC}" sibTransId="{0EEC079D-AC61-4852-85D2-A3524E06DCDD}"/>
-    <dgm:cxn modelId="{626F6C9F-DE9A-46FD-A1DB-47D21E04D85F}" srcId="{8EF00D03-04AC-4216-A044-3265A5CE2227}" destId="{BA8379AE-F6E6-4D08-9170-B6456D995DF5}" srcOrd="1" destOrd="0" parTransId="{9FC978EB-2D96-41F1-A0E5-AF38A85E60AF}" sibTransId="{CACF5E00-885A-4C3A-9C3E-9496F613BD7B}"/>
+    <dgm:cxn modelId="{96ABA79A-27C7-3C4B-9E27-8846285D055F}" type="presOf" srcId="{1DE6E16F-28D2-A748-8E55-B3CAC282B341}" destId="{FCE97ABA-5AB0-4664-B1DC-F297F6022C4D}" srcOrd="0" destOrd="1" presId="urn:microsoft.com/office/officeart/2009/layout/CircleArrowProcess"/>
     <dgm:cxn modelId="{959306A7-52C0-4DFC-AA39-2747B9BAB8EB}" type="presOf" srcId="{AEABAE79-32C2-4CFF-9050-7392A4D26E9A}" destId="{A69ACF2C-4DC0-401D-81DC-C6C00890019E}" srcOrd="0" destOrd="0" presId="urn:microsoft.com/office/officeart/2009/layout/CircleArrowProcess"/>
     <dgm:cxn modelId="{44AA91B2-3226-415F-9590-FEF5F7740FEC}" type="presOf" srcId="{E070C633-3207-41CF-ACE5-54D91E4F09E9}" destId="{A69ACF2C-4DC0-401D-81DC-C6C00890019E}" srcOrd="0" destOrd="1" presId="urn:microsoft.com/office/officeart/2009/layout/CircleArrowProcess"/>
     <dgm:cxn modelId="{94E5A9B2-4E44-4ED4-A267-0DB600098DE5}" srcId="{05CFCB54-ED14-4616-BBD6-40E0A0136D62}" destId="{7BC7E6F9-A9A7-45D8-ABDA-A91366CE4F85}" srcOrd="1" destOrd="0" parTransId="{8B77130B-5EB3-4C21-A6AB-0E17B6515ECE}" sibTransId="{AFE51257-2C64-4EFC-BFD0-449D1F4603CE}"/>
     <dgm:cxn modelId="{350F21CD-5DB5-47AA-97AA-04B9E978E05C}" type="presOf" srcId="{CD1A197E-EA25-48EB-BA02-73CDF66DC15B}" destId="{AA028B1F-CB70-41B5-A801-6597AA3BEAAF}" srcOrd="0" destOrd="0" presId="urn:microsoft.com/office/officeart/2009/layout/CircleArrowProcess"/>
     <dgm:cxn modelId="{EE9493D0-CE5E-47E4-A0E2-721C0A24E692}" type="presOf" srcId="{05CFCB54-ED14-4616-BBD6-40E0A0136D62}" destId="{4C4B7430-A799-40ED-AAF4-3A491A907D2A}" srcOrd="0" destOrd="0" presId="urn:microsoft.com/office/officeart/2009/layout/CircleArrowProcess"/>
     <dgm:cxn modelId="{171C3BE2-12EF-4AAE-A1B5-FBC0F6C87C08}" type="presOf" srcId="{8EF00D03-04AC-4216-A044-3265A5CE2227}" destId="{34F321BC-3901-40E6-8FDD-F586CFFDDC3A}" srcOrd="0" destOrd="0" presId="urn:microsoft.com/office/officeart/2009/layout/CircleArrowProcess"/>
+    <dgm:cxn modelId="{88AFD1E6-0976-2C43-B2A8-47B07F81D9A1}" type="presOf" srcId="{3D0DDCF7-5FF2-584B-82F5-0D23BB180BCC}" destId="{AA028B1F-CB70-41B5-A801-6597AA3BEAAF}" srcOrd="0" destOrd="1" presId="urn:microsoft.com/office/officeart/2009/layout/CircleArrowProcess"/>
     <dgm:cxn modelId="{E740ABF2-B399-4CC2-A164-2ED41E6861D1}" srcId="{7BC7E6F9-A9A7-45D8-ABDA-A91366CE4F85}" destId="{B1405BF2-A2AF-42FE-A07C-A8837982ED35}" srcOrd="1" destOrd="0" parTransId="{2B8584A3-592D-45F5-B903-CC4F4FD6BA9A}" sibTransId="{12324D71-4D0A-4772-9050-39DD561C61CD}"/>
     <dgm:cxn modelId="{8A1FA8FA-05A6-489E-9740-6F3F48D8075F}" srcId="{74F890E6-B6CE-4E8F-BAD0-92185ED3D5C9}" destId="{AEABAE79-32C2-4CFF-9050-7392A4D26E9A}" srcOrd="0" destOrd="0" parTransId="{4FAAB62F-6CB3-4F77-B873-C8EACC9574BD}" sibTransId="{3FD755A4-12A8-4284-B6D9-A5084F6425FE}"/>
     <dgm:cxn modelId="{471A2640-8A29-4B18-8088-69E3354A43B4}" type="presParOf" srcId="{4C4B7430-A799-40ED-AAF4-3A491A907D2A}" destId="{329F029C-7B9C-4E50-AC12-9E061212FEAE}" srcOrd="0" destOrd="0" presId="urn:microsoft.com/office/officeart/2009/layout/CircleArrowProcess"/>
@@ -1748,7 +1779,14 @@
           </a:pPr>
           <a:r>
             <a:rPr lang="de-CH" sz="1400" kern="1200" noProof="0" dirty="0"/>
-            <a:t>Einarbeitung im Selbststudium</a:t>
+            <a:t>Einarbeitung vor Ort</a:t>
+          </a:r>
+          <a:br>
+            <a:rPr lang="de-CH" sz="1400" kern="1200" noProof="0" dirty="0"/>
+          </a:br>
+          <a:r>
+            <a:rPr lang="de-CH" sz="1400" kern="1200" noProof="0" dirty="0"/>
+            <a:t>(2. Lektion)</a:t>
           </a:r>
         </a:p>
       </dsp:txBody>
@@ -1891,7 +1929,7 @@
           </a:pPr>
           <a:r>
             <a:rPr lang="de-CH" sz="1400" kern="1200" noProof="0" dirty="0"/>
-            <a:t>Lernvideos / - texte</a:t>
+            <a:t>Lernvideos / -texte</a:t>
           </a:r>
         </a:p>
         <a:p>
@@ -2113,7 +2151,7 @@
           </a:pPr>
           <a:r>
             <a:rPr lang="de-CH" sz="1400" kern="1200" noProof="0" dirty="0"/>
-            <a:t>Diskussion der Vertiefung</a:t>
+            <a:t>Übungsblatt</a:t>
           </a:r>
         </a:p>
         <a:p>
@@ -2132,7 +2170,7 @@
           </a:pPr>
           <a:r>
             <a:rPr lang="de-CH" sz="1400" kern="1200" noProof="0" dirty="0"/>
-            <a:t>Fragen klären</a:t>
+            <a:t>Diskussionsforum</a:t>
           </a:r>
         </a:p>
       </dsp:txBody>
@@ -2192,21 +2230,7 @@
           </a:pPr>
           <a:r>
             <a:rPr lang="de-CH" sz="1400" kern="1200" noProof="0" dirty="0"/>
-            <a:t>Festigung</a:t>
-          </a:r>
-          <a:br>
-            <a:rPr lang="de-CH" sz="1400" kern="1200" noProof="0" dirty="0"/>
-          </a:br>
-          <a:r>
-            <a:rPr lang="de-CH" sz="1400" kern="1200" noProof="0" dirty="0"/>
-            <a:t>vor Ort </a:t>
-          </a:r>
-          <a:br>
-            <a:rPr lang="de-CH" sz="1400" kern="1200" noProof="0" dirty="0"/>
-          </a:br>
-          <a:r>
-            <a:rPr lang="de-CH" sz="1400" kern="1200" noProof="0" dirty="0"/>
-            <a:t>(1. Lektion)</a:t>
+            <a:t>Übungen im Selbststudium</a:t>
           </a:r>
         </a:p>
       </dsp:txBody>
@@ -2347,7 +2371,25 @@
           </a:pPr>
           <a:r>
             <a:rPr lang="de-CH" sz="1400" kern="1200" noProof="0" dirty="0"/>
-            <a:t>Übungsblatt</a:t>
+            <a:t>Diskussion der Vertiefung &amp; Übungen</a:t>
+          </a:r>
+        </a:p>
+        <a:p>
+          <a:pPr marL="114300" lvl="1" indent="-114300" algn="l" defTabSz="622300">
+            <a:lnSpc>
+              <a:spcPct val="90000"/>
+            </a:lnSpc>
+            <a:spcBef>
+              <a:spcPct val="0"/>
+            </a:spcBef>
+            <a:spcAft>
+              <a:spcPct val="15000"/>
+            </a:spcAft>
+            <a:buChar char="•"/>
+          </a:pPr>
+          <a:r>
+            <a:rPr lang="de-CH" sz="1400" kern="1200" noProof="0" dirty="0"/>
+            <a:t>Fragen klären</a:t>
           </a:r>
         </a:p>
       </dsp:txBody>
@@ -2407,7 +2449,7 @@
           </a:pPr>
           <a:r>
             <a:rPr lang="de-CH" sz="1400" kern="1200" noProof="0" dirty="0"/>
-            <a:t>Übungen vor Ort (2. Lektion) &amp; im Selbststudium</a:t>
+            <a:t>Abschluss vor Ort (2. Lektion)</a:t>
           </a:r>
         </a:p>
       </dsp:txBody>
@@ -5612,7 +5654,7 @@
           <a:p>
             <a:fld id="{1C4DB9DB-6345-4FBB-AF46-CB02900B33DA}" type="datetimeFigureOut">
               <a:rPr lang="de-CH" smtClean="0"/>
-              <a:t>27.01.26</a:t>
+              <a:t>19.02.26</a:t>
             </a:fld>
             <a:endParaRPr lang="de-CH"/>
           </a:p>
@@ -8664,10 +8706,10 @@
       </p:sp>
       <p:pic>
         <p:nvPicPr>
-          <p:cNvPr id="7" name="Inhaltsplatzhalter 6">
-            <a:extLst>
-              <a:ext uri="{FF2B5EF4-FFF2-40B4-BE49-F238E27FC236}">
-                <a16:creationId xmlns:a16="http://schemas.microsoft.com/office/drawing/2014/main" id="{D838BC94-62B7-C9C9-E189-C220E1C93EBE}"/>
+          <p:cNvPr id="10" name="Inhaltsplatzhalter 9">
+            <a:extLst>
+              <a:ext uri="{FF2B5EF4-FFF2-40B4-BE49-F238E27FC236}">
+                <a16:creationId xmlns:a16="http://schemas.microsoft.com/office/drawing/2014/main" id="{486829AA-CBA8-F5E6-4791-8F7D8D7630E8}"/>
               </a:ext>
             </a:extLst>
           </p:cNvPr>
@@ -8679,24 +8721,29 @@
           </p:nvPr>
         </p:nvPicPr>
         <p:blipFill>
-          <a:blip r:embed="rId2">
-            <a:extLst>
-              <a:ext uri="{28A0092B-C50C-407E-A947-70E740481C1C}">
-                <a14:useLocalDpi xmlns:a14="http://schemas.microsoft.com/office/drawing/2010/main" val="0"/>
-              </a:ext>
-            </a:extLst>
-          </a:blip>
-          <a:srcRect/>
-          <a:stretch/>
+          <a:blip r:embed="rId2"/>
+          <a:stretch>
+            <a:fillRect/>
+          </a:stretch>
         </p:blipFill>
         <p:spPr>
           <a:xfrm>
-            <a:off x="3586941" y="434485"/>
-            <a:ext cx="7797339" cy="5897220"/>
+            <a:off x="3535057" y="606810"/>
+            <a:ext cx="7850133" cy="5644380"/>
           </a:xfrm>
           <a:prstGeom prst="rect">
             <a:avLst/>
           </a:prstGeom>
+          <a:ln>
+            <a:noFill/>
+          </a:ln>
+          <a:effectLst>
+            <a:outerShdw blurRad="292100" dist="139700" dir="2700000" algn="tl" rotWithShape="0">
+              <a:srgbClr val="333333">
+                <a:alpha val="65000"/>
+              </a:srgbClr>
+            </a:outerShdw>
+          </a:effectLst>
         </p:spPr>
       </p:pic>
     </p:spTree>
@@ -8960,7 +9007,7 @@
           <p:nvPr>
             <p:extLst>
               <p:ext uri="{D42A27DB-BD31-4B8C-83A1-F6EECF244321}">
-                <p14:modId xmlns:p14="http://schemas.microsoft.com/office/powerpoint/2010/main" val="1240605011"/>
+                <p14:modId xmlns:p14="http://schemas.microsoft.com/office/powerpoint/2010/main" val="1152561775"/>
               </p:ext>
             </p:extLst>
           </p:nvPr>
@@ -8993,7 +9040,13 @@
   <p:cSld>
     <p:spTree>
       <p:nvGrpSpPr>
-        <p:cNvPr id="1" name=""/>
+        <p:cNvPr id="1" name="">
+          <a:extLst>
+            <a:ext uri="{FF2B5EF4-FFF2-40B4-BE49-F238E27FC236}">
+              <a16:creationId xmlns:a16="http://schemas.microsoft.com/office/drawing/2014/main" id="{B23BAA9E-EA4D-7944-C333-67E29F33CFA0}"/>
+            </a:ext>
+          </a:extLst>
+        </p:cNvPr>
         <p:cNvGrpSpPr/>
         <p:nvPr/>
       </p:nvGrpSpPr>
@@ -9010,7 +9063,7 @@
           <p:cNvPr id="2" name="Titel 1">
             <a:extLst>
               <a:ext uri="{FF2B5EF4-FFF2-40B4-BE49-F238E27FC236}">
-                <a16:creationId xmlns:a16="http://schemas.microsoft.com/office/drawing/2014/main" id="{FF08357C-6E0C-4697-AB82-CB1BAFA33B25}"/>
+                <a16:creationId xmlns:a16="http://schemas.microsoft.com/office/drawing/2014/main" id="{6CCE65F2-C713-B71F-97A4-7C01CE238F95}"/>
               </a:ext>
             </a:extLst>
           </p:cNvPr>
@@ -9038,7 +9091,7 @@
           <p:cNvPr id="3" name="Fußzeilenplatzhalter 2">
             <a:extLst>
               <a:ext uri="{FF2B5EF4-FFF2-40B4-BE49-F238E27FC236}">
-                <a16:creationId xmlns:a16="http://schemas.microsoft.com/office/drawing/2014/main" id="{3720602F-D603-4843-AD22-B4DE1EB48943}"/>
+                <a16:creationId xmlns:a16="http://schemas.microsoft.com/office/drawing/2014/main" id="{C4997B58-0430-9D1F-C245-F65A84CA0BD9}"/>
               </a:ext>
             </a:extLst>
           </p:cNvPr>
@@ -9066,7 +9119,7 @@
           <p:cNvPr id="4" name="Foliennummernplatzhalter 3">
             <a:extLst>
               <a:ext uri="{FF2B5EF4-FFF2-40B4-BE49-F238E27FC236}">
-                <a16:creationId xmlns:a16="http://schemas.microsoft.com/office/drawing/2014/main" id="{CC906A0A-F14B-4AD2-B9FF-8E543790A404}"/>
+                <a16:creationId xmlns:a16="http://schemas.microsoft.com/office/drawing/2014/main" id="{AB0824E4-C964-F09A-B0EF-7C7BA9B1E58B}"/>
               </a:ext>
             </a:extLst>
           </p:cNvPr>
@@ -9091,1306 +9144,41 @@
           </a:p>
         </p:txBody>
       </p:sp>
-      <p:graphicFrame>
-        <p:nvGraphicFramePr>
-          <p:cNvPr id="10" name="Inhaltsplatzhalter 9">
-            <a:extLst>
-              <a:ext uri="{FF2B5EF4-FFF2-40B4-BE49-F238E27FC236}">
-                <a16:creationId xmlns:a16="http://schemas.microsoft.com/office/drawing/2014/main" id="{C653CC04-850A-088E-D4A4-5F0D2E4E7E5B}"/>
-              </a:ext>
-            </a:extLst>
-          </p:cNvPr>
-          <p:cNvGraphicFramePr>
-            <a:graphicFrameLocks noGrp="1"/>
-          </p:cNvGraphicFramePr>
+      <p:pic>
+        <p:nvPicPr>
+          <p:cNvPr id="15" name="Inhaltsplatzhalter 14">
+            <a:extLst>
+              <a:ext uri="{FF2B5EF4-FFF2-40B4-BE49-F238E27FC236}">
+                <a16:creationId xmlns:a16="http://schemas.microsoft.com/office/drawing/2014/main" id="{AD70E99A-BD7E-CEA5-997D-315D051819FC}"/>
+              </a:ext>
+            </a:extLst>
+          </p:cNvPr>
+          <p:cNvPicPr>
+            <a:picLocks noGrp="1" noChangeAspect="1"/>
+          </p:cNvPicPr>
           <p:nvPr>
             <p:ph sz="quarter" idx="12"/>
-            <p:extLst>
-              <p:ext uri="{D42A27DB-BD31-4B8C-83A1-F6EECF244321}">
-                <p14:modId xmlns:p14="http://schemas.microsoft.com/office/powerpoint/2010/main" val="1466325854"/>
-              </p:ext>
-            </p:extLst>
           </p:nvPr>
-        </p:nvGraphicFramePr>
-        <p:xfrm>
-          <a:off x="203200" y="1236663"/>
-          <a:ext cx="11535247" cy="5167815"/>
-        </p:xfrm>
-        <a:graphic>
-          <a:graphicData uri="http://schemas.openxmlformats.org/drawingml/2006/table">
-            <a:tbl>
-              <a:tblPr firstRow="1" firstCol="1" bandRow="1">
-                <a:tableStyleId>{5C22544A-7EE6-4342-B048-85BDC9FD1C3A}</a:tableStyleId>
-              </a:tblPr>
-              <a:tblGrid>
-                <a:gridCol w="1644576">
-                  <a:extLst>
-                    <a:ext uri="{9D8B030D-6E8A-4147-A177-3AD203B41FA5}">
-                      <a16:colId xmlns:a16="http://schemas.microsoft.com/office/drawing/2014/main" val="4170622520"/>
-                    </a:ext>
-                  </a:extLst>
-                </a:gridCol>
-                <a:gridCol w="2917797">
-                  <a:extLst>
-                    <a:ext uri="{9D8B030D-6E8A-4147-A177-3AD203B41FA5}">
-                      <a16:colId xmlns:a16="http://schemas.microsoft.com/office/drawing/2014/main" val="1368543784"/>
-                    </a:ext>
-                  </a:extLst>
-                </a:gridCol>
-                <a:gridCol w="2984111">
-                  <a:extLst>
-                    <a:ext uri="{9D8B030D-6E8A-4147-A177-3AD203B41FA5}">
-                      <a16:colId xmlns:a16="http://schemas.microsoft.com/office/drawing/2014/main" val="4016831205"/>
-                    </a:ext>
-                  </a:extLst>
-                </a:gridCol>
-                <a:gridCol w="1263274">
-                  <a:extLst>
-                    <a:ext uri="{9D8B030D-6E8A-4147-A177-3AD203B41FA5}">
-                      <a16:colId xmlns:a16="http://schemas.microsoft.com/office/drawing/2014/main" val="1664759635"/>
-                    </a:ext>
-                  </a:extLst>
-                </a:gridCol>
-                <a:gridCol w="1462215">
-                  <a:extLst>
-                    <a:ext uri="{9D8B030D-6E8A-4147-A177-3AD203B41FA5}">
-                      <a16:colId xmlns:a16="http://schemas.microsoft.com/office/drawing/2014/main" val="3219812829"/>
-                    </a:ext>
-                  </a:extLst>
-                </a:gridCol>
-                <a:gridCol w="1263274">
-                  <a:extLst>
-                    <a:ext uri="{9D8B030D-6E8A-4147-A177-3AD203B41FA5}">
-                      <a16:colId xmlns:a16="http://schemas.microsoft.com/office/drawing/2014/main" val="2052283094"/>
-                    </a:ext>
-                  </a:extLst>
-                </a:gridCol>
-              </a:tblGrid>
-              <a:tr h="353296">
-                <a:tc>
-                  <a:txBody>
-                    <a:bodyPr/>
-                    <a:lstStyle/>
-                    <a:p>
-                      <a:pPr algn="l" fontAlgn="b"/>
-                      <a:r>
-                        <a:rPr lang="de-CH" sz="1200" b="1" u="none" strike="noStrike" noProof="0" dirty="0">
-                          <a:solidFill>
-                            <a:srgbClr val="FFFFFF"/>
-                          </a:solidFill>
-                          <a:effectLst/>
-                        </a:rPr>
-                        <a:t>Phase</a:t>
-                      </a:r>
-                      <a:endParaRPr lang="de-CH" sz="1200" b="1" i="0" u="none" strike="noStrike" noProof="0" dirty="0">
-                        <a:solidFill>
-                          <a:srgbClr val="FFFFFF"/>
-                        </a:solidFill>
-                        <a:effectLst/>
-                        <a:latin typeface="Arial" panose="020B0604020202020204" pitchFamily="34" charset="0"/>
-                      </a:endParaRPr>
-                    </a:p>
-                  </a:txBody>
-                  <a:tcPr anchor="ctr"/>
-                </a:tc>
-                <a:tc>
-                  <a:txBody>
-                    <a:bodyPr/>
-                    <a:lstStyle/>
-                    <a:p>
-                      <a:pPr algn="l" fontAlgn="b"/>
-                      <a:r>
-                        <a:rPr lang="de-CH" sz="1200" b="1" u="none" strike="noStrike" noProof="0" dirty="0">
-                          <a:solidFill>
-                            <a:srgbClr val="FFFFFF"/>
-                          </a:solidFill>
-                          <a:effectLst/>
-                        </a:rPr>
-                        <a:t>Ziele</a:t>
-                      </a:r>
-                      <a:endParaRPr lang="de-CH" sz="1200" b="1" i="0" u="none" strike="noStrike" noProof="0" dirty="0">
-                        <a:solidFill>
-                          <a:srgbClr val="FFFFFF"/>
-                        </a:solidFill>
-                        <a:effectLst/>
-                        <a:latin typeface="Arial" panose="020B0604020202020204" pitchFamily="34" charset="0"/>
-                      </a:endParaRPr>
-                    </a:p>
-                  </a:txBody>
-                  <a:tcPr anchor="ctr"/>
-                </a:tc>
-                <a:tc>
-                  <a:txBody>
-                    <a:bodyPr/>
-                    <a:lstStyle/>
-                    <a:p>
-                      <a:pPr algn="l" fontAlgn="b"/>
-                      <a:r>
-                        <a:rPr lang="de-CH" sz="1200" b="1" u="none" strike="noStrike" noProof="0" dirty="0">
-                          <a:solidFill>
-                            <a:srgbClr val="FFFFFF"/>
-                          </a:solidFill>
-                          <a:effectLst/>
-                        </a:rPr>
-                        <a:t>Aktivitäten</a:t>
-                      </a:r>
-                      <a:endParaRPr lang="de-CH" sz="1200" b="1" i="0" u="none" strike="noStrike" noProof="0" dirty="0">
-                        <a:solidFill>
-                          <a:srgbClr val="FFFFFF"/>
-                        </a:solidFill>
-                        <a:effectLst/>
-                        <a:latin typeface="Arial" panose="020B0604020202020204" pitchFamily="34" charset="0"/>
-                      </a:endParaRPr>
-                    </a:p>
-                  </a:txBody>
-                  <a:tcPr anchor="ctr"/>
-                </a:tc>
-                <a:tc>
-                  <a:txBody>
-                    <a:bodyPr/>
-                    <a:lstStyle/>
-                    <a:p>
-                      <a:pPr algn="l" fontAlgn="b"/>
-                      <a:r>
-                        <a:rPr lang="de-CH" sz="1200" b="1" u="none" strike="noStrike" noProof="0" dirty="0">
-                          <a:solidFill>
-                            <a:srgbClr val="FFFFFF"/>
-                          </a:solidFill>
-                          <a:effectLst/>
-                        </a:rPr>
-                        <a:t>Sozialform</a:t>
-                      </a:r>
-                      <a:endParaRPr lang="de-CH" sz="1200" b="1" i="0" u="none" strike="noStrike" noProof="0" dirty="0">
-                        <a:solidFill>
-                          <a:srgbClr val="FFFFFF"/>
-                        </a:solidFill>
-                        <a:effectLst/>
-                        <a:latin typeface="Arial" panose="020B0604020202020204" pitchFamily="34" charset="0"/>
-                      </a:endParaRPr>
-                    </a:p>
-                  </a:txBody>
-                  <a:tcPr anchor="ctr"/>
-                </a:tc>
-                <a:tc>
-                  <a:txBody>
-                    <a:bodyPr/>
-                    <a:lstStyle/>
-                    <a:p>
-                      <a:pPr algn="l" fontAlgn="b"/>
-                      <a:r>
-                        <a:rPr lang="de-CH" sz="1200" b="1" u="none" strike="noStrike" noProof="0" dirty="0">
-                          <a:solidFill>
-                            <a:srgbClr val="FFFFFF"/>
-                          </a:solidFill>
-                          <a:effectLst/>
-                        </a:rPr>
-                        <a:t>Medien / Material</a:t>
-                      </a:r>
-                      <a:endParaRPr lang="de-CH" sz="1200" b="1" i="0" u="none" strike="noStrike" noProof="0" dirty="0">
-                        <a:solidFill>
-                          <a:srgbClr val="FFFFFF"/>
-                        </a:solidFill>
-                        <a:effectLst/>
-                        <a:latin typeface="Arial" panose="020B0604020202020204" pitchFamily="34" charset="0"/>
-                      </a:endParaRPr>
-                    </a:p>
-                  </a:txBody>
-                  <a:tcPr anchor="ctr"/>
-                </a:tc>
-                <a:tc>
-                  <a:txBody>
-                    <a:bodyPr/>
-                    <a:lstStyle/>
-                    <a:p>
-                      <a:pPr algn="l" fontAlgn="b"/>
-                      <a:r>
-                        <a:rPr lang="de-CH" sz="1200" b="1" u="none" strike="noStrike" noProof="0" dirty="0">
-                          <a:solidFill>
-                            <a:srgbClr val="FFFFFF"/>
-                          </a:solidFill>
-                          <a:effectLst/>
-                        </a:rPr>
-                        <a:t>Dauer / Aufwand</a:t>
-                      </a:r>
-                      <a:endParaRPr lang="de-CH" sz="1200" b="1" i="0" u="none" strike="noStrike" noProof="0" dirty="0">
-                        <a:solidFill>
-                          <a:srgbClr val="FFFFFF"/>
-                        </a:solidFill>
-                        <a:effectLst/>
-                        <a:latin typeface="Arial" panose="020B0604020202020204" pitchFamily="34" charset="0"/>
-                      </a:endParaRPr>
-                    </a:p>
-                  </a:txBody>
-                  <a:tcPr anchor="ctr"/>
-                </a:tc>
-                <a:extLst>
-                  <a:ext uri="{0D108BD9-81ED-4DB2-BD59-A6C34878D82A}">
-                    <a16:rowId xmlns:a16="http://schemas.microsoft.com/office/drawing/2014/main" val="1208710628"/>
-                  </a:ext>
-                </a:extLst>
-              </a:tr>
-              <a:tr h="942123">
-                <a:tc>
-                  <a:txBody>
-                    <a:bodyPr/>
-                    <a:lstStyle/>
-                    <a:p>
-                      <a:pPr algn="l" fontAlgn="b"/>
-                      <a:r>
-                        <a:rPr lang="de-CH" sz="1200" b="1" u="none" strike="noStrike" noProof="0" dirty="0">
-                          <a:solidFill>
-                            <a:srgbClr val="000000"/>
-                          </a:solidFill>
-                          <a:effectLst/>
-                        </a:rPr>
-                        <a:t>Einarbeitung</a:t>
-                      </a:r>
-                      <a:br>
-                        <a:rPr lang="de-CH" sz="1200" b="1" u="none" strike="noStrike" noProof="0" dirty="0">
-                          <a:solidFill>
-                            <a:srgbClr val="000000"/>
-                          </a:solidFill>
-                          <a:effectLst/>
-                        </a:rPr>
-                      </a:br>
-                      <a:r>
-                        <a:rPr lang="de-CH" sz="1200" b="1" u="none" strike="noStrike" noProof="0" dirty="0">
-                          <a:solidFill>
-                            <a:srgbClr val="000000"/>
-                          </a:solidFill>
-                          <a:effectLst/>
-                        </a:rPr>
-                        <a:t>(Fr - Mo)</a:t>
-                      </a:r>
-                      <a:endParaRPr lang="de-CH" sz="1200" b="1" i="0" u="none" strike="noStrike" noProof="0" dirty="0">
-                        <a:solidFill>
-                          <a:srgbClr val="000000"/>
-                        </a:solidFill>
-                        <a:effectLst/>
-                        <a:latin typeface="Arial" panose="020B0604020202020204" pitchFamily="34" charset="0"/>
-                      </a:endParaRPr>
-                    </a:p>
-                  </a:txBody>
-                  <a:tcPr anchor="ctr"/>
-                </a:tc>
-                <a:tc>
-                  <a:txBody>
-                    <a:bodyPr/>
-                    <a:lstStyle/>
-                    <a:p>
-                      <a:pPr algn="l" fontAlgn="b"/>
-                      <a:r>
-                        <a:rPr lang="de-CH" sz="1200" b="0" u="none" strike="noStrike" noProof="0" dirty="0">
-                          <a:solidFill>
-                            <a:srgbClr val="000000"/>
-                          </a:solidFill>
-                          <a:effectLst/>
-                        </a:rPr>
-                        <a:t>- Kennenlernen der Problemstellung &amp; Methode</a:t>
-                      </a:r>
-                      <a:br>
-                        <a:rPr lang="de-CH" sz="1200" b="0" u="none" strike="noStrike" noProof="0" dirty="0">
-                          <a:solidFill>
-                            <a:srgbClr val="000000"/>
-                          </a:solidFill>
-                          <a:effectLst/>
-                        </a:rPr>
-                      </a:br>
-                      <a:r>
-                        <a:rPr lang="de-CH" sz="1200" b="0" u="none" strike="noStrike" noProof="0" dirty="0">
-                          <a:solidFill>
-                            <a:srgbClr val="000000"/>
-                          </a:solidFill>
-                          <a:effectLst/>
-                        </a:rPr>
-                        <a:t>- exploratives Erarbeiten von Lösungen / Implementationen</a:t>
-                      </a:r>
-                      <a:endParaRPr lang="de-CH" sz="1200" b="0" i="0" u="none" strike="noStrike" noProof="0" dirty="0">
-                        <a:solidFill>
-                          <a:srgbClr val="000000"/>
-                        </a:solidFill>
-                        <a:effectLst/>
-                        <a:latin typeface="Arial" panose="020B0604020202020204" pitchFamily="34" charset="0"/>
-                      </a:endParaRPr>
-                    </a:p>
-                  </a:txBody>
-                  <a:tcPr anchor="ctr"/>
-                </a:tc>
-                <a:tc>
-                  <a:txBody>
-                    <a:bodyPr/>
-                    <a:lstStyle/>
-                    <a:p>
-                      <a:pPr algn="l" fontAlgn="b"/>
-                      <a:r>
-                        <a:rPr lang="de-CH" sz="1200" b="0" u="none" strike="noStrike" noProof="0" dirty="0">
-                          <a:solidFill>
-                            <a:srgbClr val="000000"/>
-                          </a:solidFill>
-                          <a:effectLst/>
-                        </a:rPr>
-                        <a:t>- Kurzer Input studieren</a:t>
-                      </a:r>
-                      <a:br>
-                        <a:rPr lang="de-CH" sz="1200" b="0" u="none" strike="noStrike" noProof="0" dirty="0">
-                          <a:solidFill>
-                            <a:srgbClr val="000000"/>
-                          </a:solidFill>
-                          <a:effectLst/>
-                        </a:rPr>
-                      </a:br>
-                      <a:r>
-                        <a:rPr lang="de-CH" sz="1200" b="0" u="none" strike="noStrike" noProof="0" dirty="0">
-                          <a:solidFill>
-                            <a:srgbClr val="000000"/>
-                          </a:solidFill>
-                          <a:effectLst/>
-                        </a:rPr>
-                        <a:t>- Selber eine Lösung versuchen zu implementieren</a:t>
-                      </a:r>
-                      <a:br>
-                        <a:rPr lang="de-CH" sz="1200" b="0" u="none" strike="noStrike" noProof="0" dirty="0">
-                          <a:solidFill>
-                            <a:srgbClr val="000000"/>
-                          </a:solidFill>
-                          <a:effectLst/>
-                        </a:rPr>
-                      </a:br>
-                      <a:r>
-                        <a:rPr lang="de-CH" sz="1200" b="0" u="none" strike="noStrike" noProof="0" dirty="0">
-                          <a:solidFill>
-                            <a:srgbClr val="000000"/>
-                          </a:solidFill>
-                          <a:effectLst/>
-                        </a:rPr>
-                        <a:t>- Fragen im Diskussionsforum stellen</a:t>
-                      </a:r>
-                      <a:endParaRPr lang="de-CH" sz="1200" b="0" i="0" u="none" strike="noStrike" noProof="0" dirty="0">
-                        <a:solidFill>
-                          <a:srgbClr val="000000"/>
-                        </a:solidFill>
-                        <a:effectLst/>
-                        <a:latin typeface="Arial" panose="020B0604020202020204" pitchFamily="34" charset="0"/>
-                      </a:endParaRPr>
-                    </a:p>
-                  </a:txBody>
-                  <a:tcPr anchor="ctr"/>
-                </a:tc>
-                <a:tc>
-                  <a:txBody>
-                    <a:bodyPr/>
-                    <a:lstStyle/>
-                    <a:p>
-                      <a:pPr algn="l" fontAlgn="b"/>
-                      <a:r>
-                        <a:rPr lang="de-CH" sz="1200" b="0" u="none" strike="noStrike" noProof="0" dirty="0">
-                          <a:solidFill>
-                            <a:srgbClr val="000000"/>
-                          </a:solidFill>
-                          <a:effectLst/>
-                        </a:rPr>
-                        <a:t>Einzeln oder in Lerngruppen (frei)</a:t>
-                      </a:r>
-                      <a:endParaRPr lang="de-CH" sz="1200" b="0" i="0" u="none" strike="noStrike" noProof="0" dirty="0">
-                        <a:solidFill>
-                          <a:srgbClr val="000000"/>
-                        </a:solidFill>
-                        <a:effectLst/>
-                        <a:latin typeface="Arial" panose="020B0604020202020204" pitchFamily="34" charset="0"/>
-                      </a:endParaRPr>
-                    </a:p>
-                  </a:txBody>
-                  <a:tcPr anchor="ctr"/>
-                </a:tc>
-                <a:tc>
-                  <a:txBody>
-                    <a:bodyPr/>
-                    <a:lstStyle/>
-                    <a:p>
-                      <a:pPr algn="l" fontAlgn="b"/>
-                      <a:r>
-                        <a:rPr lang="de-CH" sz="1200" b="0" u="none" strike="noStrike" noProof="0" dirty="0">
-                          <a:solidFill>
-                            <a:srgbClr val="000000"/>
-                          </a:solidFill>
-                          <a:effectLst/>
-                        </a:rPr>
-                        <a:t>Arbeitsblatt, Videos, Websites, Texte</a:t>
-                      </a:r>
-                      <a:endParaRPr lang="de-CH" sz="1200" b="0" i="0" u="none" strike="noStrike" noProof="0" dirty="0">
-                        <a:solidFill>
-                          <a:srgbClr val="000000"/>
-                        </a:solidFill>
-                        <a:effectLst/>
-                        <a:latin typeface="Arial" panose="020B0604020202020204" pitchFamily="34" charset="0"/>
-                      </a:endParaRPr>
-                    </a:p>
-                  </a:txBody>
-                  <a:tcPr anchor="ctr"/>
-                </a:tc>
-                <a:tc>
-                  <a:txBody>
-                    <a:bodyPr/>
-                    <a:lstStyle/>
-                    <a:p>
-                      <a:pPr algn="l" fontAlgn="b"/>
-                      <a:r>
-                        <a:rPr lang="de-CH" sz="1200" b="0" u="none" strike="noStrike" noProof="0" dirty="0">
-                          <a:solidFill>
-                            <a:srgbClr val="000000"/>
-                          </a:solidFill>
-                          <a:effectLst/>
-                        </a:rPr>
-                        <a:t>ca. 2 Stunden</a:t>
-                      </a:r>
-                      <a:endParaRPr lang="de-CH" sz="1200" b="0" i="0" u="none" strike="noStrike" noProof="0" dirty="0">
-                        <a:solidFill>
-                          <a:srgbClr val="000000"/>
-                        </a:solidFill>
-                        <a:effectLst/>
-                        <a:latin typeface="Arial" panose="020B0604020202020204" pitchFamily="34" charset="0"/>
-                      </a:endParaRPr>
-                    </a:p>
-                  </a:txBody>
-                  <a:tcPr anchor="ctr"/>
-                </a:tc>
-                <a:extLst>
-                  <a:ext uri="{0D108BD9-81ED-4DB2-BD59-A6C34878D82A}">
-                    <a16:rowId xmlns:a16="http://schemas.microsoft.com/office/drawing/2014/main" val="37815920"/>
-                  </a:ext>
-                </a:extLst>
-              </a:tr>
-              <a:tr h="942123">
-                <a:tc>
-                  <a:txBody>
-                    <a:bodyPr/>
-                    <a:lstStyle/>
-                    <a:p>
-                      <a:pPr algn="l" fontAlgn="b"/>
-                      <a:r>
-                        <a:rPr lang="de-CH" sz="1200" b="1" u="none" strike="noStrike" noProof="0" dirty="0">
-                          <a:solidFill>
-                            <a:srgbClr val="000000"/>
-                          </a:solidFill>
-                          <a:effectLst/>
-                        </a:rPr>
-                        <a:t>Vertiefung</a:t>
-                      </a:r>
-                      <a:br>
-                        <a:rPr lang="de-CH" sz="1200" b="1" u="none" strike="noStrike" noProof="0" dirty="0">
-                          <a:solidFill>
-                            <a:srgbClr val="000000"/>
-                          </a:solidFill>
-                          <a:effectLst/>
-                        </a:rPr>
-                      </a:br>
-                      <a:r>
-                        <a:rPr lang="de-CH" sz="1200" b="1" u="none" strike="noStrike" noProof="0" dirty="0">
-                          <a:solidFill>
-                            <a:srgbClr val="000000"/>
-                          </a:solidFill>
-                          <a:effectLst/>
-                        </a:rPr>
-                        <a:t>(Mo - Do)</a:t>
-                      </a:r>
-                      <a:endParaRPr lang="de-CH" sz="1200" b="1" i="0" u="none" strike="noStrike" noProof="0" dirty="0">
-                        <a:solidFill>
-                          <a:srgbClr val="000000"/>
-                        </a:solidFill>
-                        <a:effectLst/>
-                        <a:latin typeface="Arial" panose="020B0604020202020204" pitchFamily="34" charset="0"/>
-                      </a:endParaRPr>
-                    </a:p>
-                  </a:txBody>
-                  <a:tcPr anchor="ctr"/>
-                </a:tc>
-                <a:tc>
-                  <a:txBody>
-                    <a:bodyPr/>
-                    <a:lstStyle/>
-                    <a:p>
-                      <a:pPr algn="l" fontAlgn="b"/>
-                      <a:r>
-                        <a:rPr lang="de-CH" sz="1200" b="0" u="none" strike="noStrike" noProof="0" dirty="0">
-                          <a:solidFill>
-                            <a:srgbClr val="000000"/>
-                          </a:solidFill>
-                          <a:effectLst/>
-                        </a:rPr>
-                        <a:t>- Vertiefung &amp; Verfeinerung der Methode &amp; Implementation</a:t>
-                      </a:r>
-                      <a:br>
-                        <a:rPr lang="de-CH" sz="1200" b="0" u="none" strike="noStrike" noProof="0" dirty="0">
-                          <a:solidFill>
-                            <a:srgbClr val="000000"/>
-                          </a:solidFill>
-                          <a:effectLst/>
-                        </a:rPr>
-                      </a:br>
-                      <a:r>
-                        <a:rPr lang="de-CH" sz="1200" b="0" u="none" strike="noStrike" noProof="0" dirty="0">
-                          <a:solidFill>
-                            <a:srgbClr val="000000"/>
-                          </a:solidFill>
-                          <a:effectLst/>
-                        </a:rPr>
-                        <a:t>- Kennenlernen von fertigen Lösungen</a:t>
-                      </a:r>
-                      <a:endParaRPr lang="de-CH" sz="1200" b="0" i="0" u="none" strike="noStrike" noProof="0" dirty="0">
-                        <a:solidFill>
-                          <a:srgbClr val="000000"/>
-                        </a:solidFill>
-                        <a:effectLst/>
-                        <a:latin typeface="Arial" panose="020B0604020202020204" pitchFamily="34" charset="0"/>
-                      </a:endParaRPr>
-                    </a:p>
-                  </a:txBody>
-                  <a:tcPr anchor="ctr"/>
-                </a:tc>
-                <a:tc>
-                  <a:txBody>
-                    <a:bodyPr/>
-                    <a:lstStyle/>
-                    <a:p>
-                      <a:pPr algn="l" fontAlgn="b"/>
-                      <a:r>
-                        <a:rPr lang="de-CH" sz="1200" b="0" u="none" strike="noStrike" noProof="0" dirty="0">
-                          <a:solidFill>
-                            <a:srgbClr val="000000"/>
-                          </a:solidFill>
-                          <a:effectLst/>
-                        </a:rPr>
-                        <a:t>- Lernvideos &amp; -texte studieren</a:t>
-                      </a:r>
-                      <a:br>
-                        <a:rPr lang="de-CH" sz="1200" b="0" u="none" strike="noStrike" noProof="0" dirty="0">
-                          <a:solidFill>
-                            <a:srgbClr val="000000"/>
-                          </a:solidFill>
-                          <a:effectLst/>
-                        </a:rPr>
-                      </a:br>
-                      <a:r>
-                        <a:rPr lang="de-CH" sz="1200" b="0" u="none" strike="noStrike" noProof="0" dirty="0">
-                          <a:solidFill>
-                            <a:srgbClr val="000000"/>
-                          </a:solidFill>
-                          <a:effectLst/>
-                        </a:rPr>
-                        <a:t>- Beispiele bearbeiten</a:t>
-                      </a:r>
-                      <a:endParaRPr lang="de-CH" sz="1200" b="0" i="0" u="none" strike="noStrike" noProof="0" dirty="0">
-                        <a:solidFill>
-                          <a:srgbClr val="000000"/>
-                        </a:solidFill>
-                        <a:effectLst/>
-                        <a:latin typeface="Arial" panose="020B0604020202020204" pitchFamily="34" charset="0"/>
-                      </a:endParaRPr>
-                    </a:p>
-                  </a:txBody>
-                  <a:tcPr anchor="ctr"/>
-                </a:tc>
-                <a:tc>
-                  <a:txBody>
-                    <a:bodyPr/>
-                    <a:lstStyle/>
-                    <a:p>
-                      <a:pPr algn="l" fontAlgn="b"/>
-                      <a:r>
-                        <a:rPr lang="de-CH" sz="1200" b="0" u="none" strike="noStrike" noProof="0" dirty="0">
-                          <a:solidFill>
-                            <a:srgbClr val="000000"/>
-                          </a:solidFill>
-                          <a:effectLst/>
-                        </a:rPr>
-                        <a:t>Einzeln oder in Lerngruppen (frei)</a:t>
-                      </a:r>
-                      <a:endParaRPr lang="de-CH" sz="1200" b="0" i="0" u="none" strike="noStrike" noProof="0" dirty="0">
-                        <a:solidFill>
-                          <a:srgbClr val="000000"/>
-                        </a:solidFill>
-                        <a:effectLst/>
-                        <a:latin typeface="Arial" panose="020B0604020202020204" pitchFamily="34" charset="0"/>
-                      </a:endParaRPr>
-                    </a:p>
-                  </a:txBody>
-                  <a:tcPr anchor="ctr"/>
-                </a:tc>
-                <a:tc>
-                  <a:txBody>
-                    <a:bodyPr/>
-                    <a:lstStyle/>
-                    <a:p>
-                      <a:pPr algn="l" fontAlgn="b"/>
-                      <a:r>
-                        <a:rPr lang="de-CH" sz="1200" b="0" u="none" strike="noStrike" noProof="0" dirty="0">
-                          <a:solidFill>
-                            <a:srgbClr val="000000"/>
-                          </a:solidFill>
-                          <a:effectLst/>
-                        </a:rPr>
-                        <a:t>Arbeitsblatt, Videos, Websites, Texte</a:t>
-                      </a:r>
-                      <a:endParaRPr lang="de-CH" sz="1200" b="0" i="0" u="none" strike="noStrike" noProof="0" dirty="0">
-                        <a:solidFill>
-                          <a:srgbClr val="000000"/>
-                        </a:solidFill>
-                        <a:effectLst/>
-                        <a:latin typeface="Arial" panose="020B0604020202020204" pitchFamily="34" charset="0"/>
-                      </a:endParaRPr>
-                    </a:p>
-                  </a:txBody>
-                  <a:tcPr anchor="ctr"/>
-                </a:tc>
-                <a:tc>
-                  <a:txBody>
-                    <a:bodyPr/>
-                    <a:lstStyle/>
-                    <a:p>
-                      <a:pPr algn="l" fontAlgn="b"/>
-                      <a:r>
-                        <a:rPr lang="de-CH" sz="1200" b="0" u="none" strike="noStrike" noProof="0" dirty="0">
-                          <a:solidFill>
-                            <a:srgbClr val="000000"/>
-                          </a:solidFill>
-                          <a:effectLst/>
-                        </a:rPr>
-                        <a:t>ca. 1 Stunde</a:t>
-                      </a:r>
-                      <a:endParaRPr lang="de-CH" sz="1200" b="0" i="0" u="none" strike="noStrike" noProof="0" dirty="0">
-                        <a:solidFill>
-                          <a:srgbClr val="000000"/>
-                        </a:solidFill>
-                        <a:effectLst/>
-                        <a:latin typeface="Arial" panose="020B0604020202020204" pitchFamily="34" charset="0"/>
-                      </a:endParaRPr>
-                    </a:p>
-                  </a:txBody>
-                  <a:tcPr anchor="ctr"/>
-                </a:tc>
-                <a:extLst>
-                  <a:ext uri="{0D108BD9-81ED-4DB2-BD59-A6C34878D82A}">
-                    <a16:rowId xmlns:a16="http://schemas.microsoft.com/office/drawing/2014/main" val="4292240901"/>
-                  </a:ext>
-                </a:extLst>
-              </a:tr>
-              <a:tr h="942123">
-                <a:tc>
-                  <a:txBody>
-                    <a:bodyPr/>
-                    <a:lstStyle/>
-                    <a:p>
-                      <a:pPr algn="l" fontAlgn="b"/>
-                      <a:r>
-                        <a:rPr lang="de-CH" sz="1200" b="1" u="none" strike="noStrike" noProof="0" dirty="0">
-                          <a:solidFill>
-                            <a:srgbClr val="000000"/>
-                          </a:solidFill>
-                          <a:effectLst/>
-                        </a:rPr>
-                        <a:t>Halbklasse vor Ort</a:t>
-                      </a:r>
-                      <a:br>
-                        <a:rPr lang="de-CH" sz="1200" b="1" u="none" strike="noStrike" noProof="0" dirty="0">
-                          <a:solidFill>
-                            <a:srgbClr val="000000"/>
-                          </a:solidFill>
-                          <a:effectLst/>
-                        </a:rPr>
-                      </a:br>
-                      <a:r>
-                        <a:rPr lang="de-CH" sz="1200" b="1" u="none" strike="noStrike" noProof="0" dirty="0">
-                          <a:solidFill>
-                            <a:srgbClr val="000000"/>
-                          </a:solidFill>
-                          <a:effectLst/>
-                        </a:rPr>
-                        <a:t>(Do)</a:t>
-                      </a:r>
-                      <a:endParaRPr lang="de-CH" sz="1200" b="1" i="0" u="none" strike="noStrike" noProof="0" dirty="0">
-                        <a:solidFill>
-                          <a:srgbClr val="000000"/>
-                        </a:solidFill>
-                        <a:effectLst/>
-                        <a:latin typeface="Arial" panose="020B0604020202020204" pitchFamily="34" charset="0"/>
-                      </a:endParaRPr>
-                    </a:p>
-                  </a:txBody>
-                  <a:tcPr anchor="ctr"/>
-                </a:tc>
-                <a:tc>
-                  <a:txBody>
-                    <a:bodyPr/>
-                    <a:lstStyle/>
-                    <a:p>
-                      <a:pPr algn="l" fontAlgn="b"/>
-                      <a:r>
-                        <a:rPr lang="de-CH" sz="1200" b="0" u="none" strike="noStrike" noProof="0" dirty="0">
-                          <a:solidFill>
-                            <a:srgbClr val="000000"/>
-                          </a:solidFill>
-                          <a:effectLst/>
-                        </a:rPr>
-                        <a:t>- Festigung</a:t>
-                      </a:r>
-                      <a:endParaRPr lang="de-CH" sz="1200" b="0" i="0" u="none" strike="noStrike" noProof="0" dirty="0">
-                        <a:solidFill>
-                          <a:srgbClr val="000000"/>
-                        </a:solidFill>
-                        <a:effectLst/>
-                        <a:latin typeface="Arial" panose="020B0604020202020204" pitchFamily="34" charset="0"/>
-                      </a:endParaRPr>
-                    </a:p>
-                  </a:txBody>
-                  <a:tcPr anchor="ctr"/>
-                </a:tc>
-                <a:tc>
-                  <a:txBody>
-                    <a:bodyPr/>
-                    <a:lstStyle/>
-                    <a:p>
-                      <a:pPr algn="l" fontAlgn="b"/>
-                      <a:r>
-                        <a:rPr lang="de-CH" sz="1200" b="0" u="none" strike="noStrike" noProof="0" dirty="0">
-                          <a:solidFill>
-                            <a:srgbClr val="000000"/>
-                          </a:solidFill>
-                          <a:effectLst/>
-                        </a:rPr>
-                        <a:t>- Diskussion der Einarbeitung und Vertiefung</a:t>
-                      </a:r>
-                      <a:br>
-                        <a:rPr lang="de-CH" sz="1200" b="0" u="none" strike="noStrike" noProof="0" dirty="0">
-                          <a:solidFill>
-                            <a:srgbClr val="000000"/>
-                          </a:solidFill>
-                          <a:effectLst/>
-                        </a:rPr>
-                      </a:br>
-                      <a:r>
-                        <a:rPr lang="de-CH" sz="1200" b="0" u="none" strike="noStrike" noProof="0" dirty="0">
-                          <a:solidFill>
-                            <a:srgbClr val="000000"/>
-                          </a:solidFill>
-                          <a:effectLst/>
-                        </a:rPr>
-                        <a:t>- Fragen / Schwierigkeiten klären</a:t>
-                      </a:r>
-                      <a:br>
-                        <a:rPr lang="de-CH" sz="1200" b="0" u="none" strike="noStrike" noProof="0" dirty="0">
-                          <a:solidFill>
-                            <a:srgbClr val="000000"/>
-                          </a:solidFill>
-                          <a:effectLst/>
-                        </a:rPr>
-                      </a:br>
-                      <a:r>
-                        <a:rPr lang="de-CH" sz="1200" b="0" u="none" strike="noStrike" noProof="0" dirty="0">
-                          <a:solidFill>
-                            <a:srgbClr val="000000"/>
-                          </a:solidFill>
-                          <a:effectLst/>
-                        </a:rPr>
-                        <a:t>- Weitere Beispiele</a:t>
-                      </a:r>
-                      <a:endParaRPr lang="de-CH" sz="1200" b="0" i="0" u="none" strike="noStrike" noProof="0" dirty="0">
-                        <a:solidFill>
-                          <a:srgbClr val="000000"/>
-                        </a:solidFill>
-                        <a:effectLst/>
-                        <a:latin typeface="Arial" panose="020B0604020202020204" pitchFamily="34" charset="0"/>
-                      </a:endParaRPr>
-                    </a:p>
-                  </a:txBody>
-                  <a:tcPr anchor="ctr"/>
-                </a:tc>
-                <a:tc>
-                  <a:txBody>
-                    <a:bodyPr/>
-                    <a:lstStyle/>
-                    <a:p>
-                      <a:pPr algn="l" fontAlgn="b"/>
-                      <a:r>
-                        <a:rPr lang="de-CH" sz="1200" b="0" u="none" strike="noStrike" noProof="0" dirty="0">
-                          <a:solidFill>
-                            <a:srgbClr val="000000"/>
-                          </a:solidFill>
-                          <a:effectLst/>
-                        </a:rPr>
-                        <a:t>Halbklasse, Kleingruppen</a:t>
-                      </a:r>
-                      <a:endParaRPr lang="de-CH" sz="1200" b="0" i="0" u="none" strike="noStrike" noProof="0" dirty="0">
-                        <a:solidFill>
-                          <a:srgbClr val="000000"/>
-                        </a:solidFill>
-                        <a:effectLst/>
-                        <a:latin typeface="Arial" panose="020B0604020202020204" pitchFamily="34" charset="0"/>
-                      </a:endParaRPr>
-                    </a:p>
-                  </a:txBody>
-                  <a:tcPr anchor="ctr"/>
-                </a:tc>
-                <a:tc>
-                  <a:txBody>
-                    <a:bodyPr/>
-                    <a:lstStyle/>
-                    <a:p>
-                      <a:pPr algn="l" fontAlgn="b"/>
-                      <a:r>
-                        <a:rPr lang="de-CH" sz="1200" b="0" u="none" strike="noStrike" noProof="0" dirty="0">
-                          <a:solidFill>
-                            <a:srgbClr val="000000"/>
-                          </a:solidFill>
-                          <a:effectLst/>
-                        </a:rPr>
-                        <a:t>Einarbeitung und Vertiefung</a:t>
-                      </a:r>
-                      <a:endParaRPr lang="de-CH" sz="1200" b="0" i="0" u="none" strike="noStrike" noProof="0" dirty="0">
-                        <a:solidFill>
-                          <a:srgbClr val="000000"/>
-                        </a:solidFill>
-                        <a:effectLst/>
-                        <a:latin typeface="Arial" panose="020B0604020202020204" pitchFamily="34" charset="0"/>
-                      </a:endParaRPr>
-                    </a:p>
-                  </a:txBody>
-                  <a:tcPr anchor="ctr"/>
-                </a:tc>
-                <a:tc>
-                  <a:txBody>
-                    <a:bodyPr/>
-                    <a:lstStyle/>
-                    <a:p>
-                      <a:pPr algn="l" fontAlgn="b"/>
-                      <a:r>
-                        <a:rPr lang="de-CH" sz="1200" b="0" u="none" strike="noStrike" noProof="0" dirty="0">
-                          <a:solidFill>
-                            <a:srgbClr val="000000"/>
-                          </a:solidFill>
-                          <a:effectLst/>
-                        </a:rPr>
-                        <a:t>1 Lektion</a:t>
-                      </a:r>
-                      <a:endParaRPr lang="de-CH" sz="1200" b="0" i="0" u="none" strike="noStrike" noProof="0" dirty="0">
-                        <a:solidFill>
-                          <a:srgbClr val="000000"/>
-                        </a:solidFill>
-                        <a:effectLst/>
-                        <a:latin typeface="Arial" panose="020B0604020202020204" pitchFamily="34" charset="0"/>
-                      </a:endParaRPr>
-                    </a:p>
-                  </a:txBody>
-                  <a:tcPr anchor="ctr"/>
-                </a:tc>
-                <a:extLst>
-                  <a:ext uri="{0D108BD9-81ED-4DB2-BD59-A6C34878D82A}">
-                    <a16:rowId xmlns:a16="http://schemas.microsoft.com/office/drawing/2014/main" val="3742363970"/>
-                  </a:ext>
-                </a:extLst>
-              </a:tr>
-              <a:tr h="942123">
-                <a:tc>
-                  <a:txBody>
-                    <a:bodyPr/>
-                    <a:lstStyle/>
-                    <a:p>
-                      <a:pPr algn="l" fontAlgn="b"/>
-                      <a:r>
-                        <a:rPr lang="de-CH" sz="1200" b="1" u="none" strike="noStrike" noProof="0" dirty="0">
-                          <a:solidFill>
-                            <a:srgbClr val="000000"/>
-                          </a:solidFill>
-                          <a:effectLst/>
-                        </a:rPr>
-                        <a:t>Plenum vor Ort</a:t>
-                      </a:r>
-                      <a:br>
-                        <a:rPr lang="de-CH" sz="1200" b="1" u="none" strike="noStrike" noProof="0" dirty="0">
-                          <a:solidFill>
-                            <a:srgbClr val="000000"/>
-                          </a:solidFill>
-                          <a:effectLst/>
-                        </a:rPr>
-                      </a:br>
-                      <a:r>
-                        <a:rPr lang="de-CH" sz="1200" b="1" u="none" strike="noStrike" noProof="0" dirty="0">
-                          <a:solidFill>
-                            <a:srgbClr val="000000"/>
-                          </a:solidFill>
-                          <a:effectLst/>
-                        </a:rPr>
-                        <a:t>(Do)</a:t>
-                      </a:r>
-                      <a:endParaRPr lang="de-CH" sz="1200" b="1" i="0" u="none" strike="noStrike" noProof="0" dirty="0">
-                        <a:solidFill>
-                          <a:srgbClr val="000000"/>
-                        </a:solidFill>
-                        <a:effectLst/>
-                        <a:latin typeface="Arial" panose="020B0604020202020204" pitchFamily="34" charset="0"/>
-                      </a:endParaRPr>
-                    </a:p>
-                  </a:txBody>
-                  <a:tcPr anchor="ctr"/>
-                </a:tc>
-                <a:tc>
-                  <a:txBody>
-                    <a:bodyPr/>
-                    <a:lstStyle/>
-                    <a:p>
-                      <a:pPr algn="l" fontAlgn="b"/>
-                      <a:r>
-                        <a:rPr lang="de-CH" sz="1200" b="0" u="none" strike="noStrike" noProof="0" dirty="0">
-                          <a:solidFill>
-                            <a:srgbClr val="000000"/>
-                          </a:solidFill>
-                          <a:effectLst/>
-                        </a:rPr>
-                        <a:t>- Festigung</a:t>
-                      </a:r>
-                      <a:endParaRPr lang="de-CH" sz="1200" b="0" i="0" u="none" strike="noStrike" noProof="0" dirty="0">
-                        <a:solidFill>
-                          <a:srgbClr val="000000"/>
-                        </a:solidFill>
-                        <a:effectLst/>
-                        <a:latin typeface="Arial" panose="020B0604020202020204" pitchFamily="34" charset="0"/>
-                      </a:endParaRPr>
-                    </a:p>
-                  </a:txBody>
-                  <a:tcPr anchor="ctr"/>
-                </a:tc>
-                <a:tc>
-                  <a:txBody>
-                    <a:bodyPr/>
-                    <a:lstStyle/>
-                    <a:p>
-                      <a:pPr algn="l" fontAlgn="b"/>
-                      <a:r>
-                        <a:rPr lang="de-CH" sz="1200" b="0" u="none" strike="noStrike" noProof="0" dirty="0">
-                          <a:solidFill>
-                            <a:srgbClr val="000000"/>
-                          </a:solidFill>
-                          <a:effectLst/>
-                        </a:rPr>
-                        <a:t>- Arbeit am Übungsblatt</a:t>
-                      </a:r>
-                      <a:endParaRPr lang="de-CH" sz="1200" b="0" i="0" u="none" strike="noStrike" noProof="0" dirty="0">
-                        <a:solidFill>
-                          <a:srgbClr val="000000"/>
-                        </a:solidFill>
-                        <a:effectLst/>
-                        <a:latin typeface="Arial" panose="020B0604020202020204" pitchFamily="34" charset="0"/>
-                      </a:endParaRPr>
-                    </a:p>
-                  </a:txBody>
-                  <a:tcPr anchor="ctr"/>
-                </a:tc>
-                <a:tc>
-                  <a:txBody>
-                    <a:bodyPr/>
-                    <a:lstStyle/>
-                    <a:p>
-                      <a:pPr algn="l" fontAlgn="b"/>
-                      <a:r>
-                        <a:rPr lang="de-CH" sz="1200" b="0" u="none" strike="noStrike" noProof="0" dirty="0">
-                          <a:solidFill>
-                            <a:srgbClr val="000000"/>
-                          </a:solidFill>
-                          <a:effectLst/>
-                        </a:rPr>
-                        <a:t>Plenum / individuell</a:t>
-                      </a:r>
-                      <a:endParaRPr lang="de-CH" sz="1200" b="0" i="0" u="none" strike="noStrike" noProof="0" dirty="0">
-                        <a:solidFill>
-                          <a:srgbClr val="000000"/>
-                        </a:solidFill>
-                        <a:effectLst/>
-                        <a:latin typeface="Arial" panose="020B0604020202020204" pitchFamily="34" charset="0"/>
-                      </a:endParaRPr>
-                    </a:p>
-                  </a:txBody>
-                  <a:tcPr anchor="ctr"/>
-                </a:tc>
-                <a:tc>
-                  <a:txBody>
-                    <a:bodyPr/>
-                    <a:lstStyle/>
-                    <a:p>
-                      <a:pPr algn="l" fontAlgn="b"/>
-                      <a:r>
-                        <a:rPr lang="de-CH" sz="1200" b="0" u="none" strike="noStrike" noProof="0" dirty="0">
-                          <a:solidFill>
-                            <a:srgbClr val="000000"/>
-                          </a:solidFill>
-                          <a:effectLst/>
-                        </a:rPr>
-                        <a:t>Übungsblatt</a:t>
-                      </a:r>
-                      <a:endParaRPr lang="de-CH" sz="1200" b="0" i="0" u="none" strike="noStrike" noProof="0" dirty="0">
-                        <a:solidFill>
-                          <a:srgbClr val="000000"/>
-                        </a:solidFill>
-                        <a:effectLst/>
-                        <a:latin typeface="Arial" panose="020B0604020202020204" pitchFamily="34" charset="0"/>
-                      </a:endParaRPr>
-                    </a:p>
-                  </a:txBody>
-                  <a:tcPr anchor="ctr"/>
-                </a:tc>
-                <a:tc>
-                  <a:txBody>
-                    <a:bodyPr/>
-                    <a:lstStyle/>
-                    <a:p>
-                      <a:pPr algn="l" fontAlgn="b"/>
-                      <a:r>
-                        <a:rPr lang="de-CH" sz="1200" b="0" u="none" strike="noStrike" noProof="0" dirty="0">
-                          <a:solidFill>
-                            <a:srgbClr val="000000"/>
-                          </a:solidFill>
-                          <a:effectLst/>
-                        </a:rPr>
-                        <a:t>1 Lektion</a:t>
-                      </a:r>
-                      <a:endParaRPr lang="de-CH" sz="1200" b="0" i="0" u="none" strike="noStrike" noProof="0" dirty="0">
-                        <a:solidFill>
-                          <a:srgbClr val="000000"/>
-                        </a:solidFill>
-                        <a:effectLst/>
-                        <a:latin typeface="Arial" panose="020B0604020202020204" pitchFamily="34" charset="0"/>
-                      </a:endParaRPr>
-                    </a:p>
-                  </a:txBody>
-                  <a:tcPr anchor="ctr"/>
-                </a:tc>
-                <a:extLst>
-                  <a:ext uri="{0D108BD9-81ED-4DB2-BD59-A6C34878D82A}">
-                    <a16:rowId xmlns:a16="http://schemas.microsoft.com/office/drawing/2014/main" val="3547554"/>
-                  </a:ext>
-                </a:extLst>
-              </a:tr>
-              <a:tr h="942123">
-                <a:tc>
-                  <a:txBody>
-                    <a:bodyPr/>
-                    <a:lstStyle/>
-                    <a:p>
-                      <a:pPr algn="l" fontAlgn="b"/>
-                      <a:r>
-                        <a:rPr lang="de-CH" sz="1200" b="1" u="none" strike="noStrike" noProof="0" dirty="0">
-                          <a:solidFill>
-                            <a:srgbClr val="000000"/>
-                          </a:solidFill>
-                          <a:effectLst/>
-                        </a:rPr>
-                        <a:t>Nachbereitung</a:t>
-                      </a:r>
-                      <a:br>
-                        <a:rPr lang="de-CH" sz="1200" b="1" u="none" strike="noStrike" noProof="0" dirty="0">
-                          <a:solidFill>
-                            <a:srgbClr val="000000"/>
-                          </a:solidFill>
-                          <a:effectLst/>
-                        </a:rPr>
-                      </a:br>
-                      <a:r>
-                        <a:rPr lang="de-CH" sz="1200" b="1" u="none" strike="noStrike" noProof="0" dirty="0">
-                          <a:solidFill>
-                            <a:srgbClr val="000000"/>
-                          </a:solidFill>
-                          <a:effectLst/>
-                        </a:rPr>
-                        <a:t>(Do - )</a:t>
-                      </a:r>
-                      <a:endParaRPr lang="de-CH" sz="1200" b="1" i="0" u="none" strike="noStrike" noProof="0" dirty="0">
-                        <a:solidFill>
-                          <a:srgbClr val="000000"/>
-                        </a:solidFill>
-                        <a:effectLst/>
-                        <a:latin typeface="Arial" panose="020B0604020202020204" pitchFamily="34" charset="0"/>
-                      </a:endParaRPr>
-                    </a:p>
-                  </a:txBody>
-                  <a:tcPr anchor="ctr"/>
-                </a:tc>
-                <a:tc>
-                  <a:txBody>
-                    <a:bodyPr/>
-                    <a:lstStyle/>
-                    <a:p>
-                      <a:pPr algn="l" fontAlgn="b"/>
-                      <a:r>
-                        <a:rPr lang="de-CH" sz="1200" b="0" u="none" strike="noStrike" noProof="0" dirty="0">
-                          <a:solidFill>
-                            <a:srgbClr val="000000"/>
-                          </a:solidFill>
-                          <a:effectLst/>
-                        </a:rPr>
-                        <a:t>- Festigung</a:t>
-                      </a:r>
-                      <a:endParaRPr lang="de-CH" sz="1200" b="0" i="0" u="none" strike="noStrike" noProof="0" dirty="0">
-                        <a:solidFill>
-                          <a:srgbClr val="000000"/>
-                        </a:solidFill>
-                        <a:effectLst/>
-                        <a:latin typeface="Arial" panose="020B0604020202020204" pitchFamily="34" charset="0"/>
-                      </a:endParaRPr>
-                    </a:p>
-                  </a:txBody>
-                  <a:tcPr anchor="ctr"/>
-                </a:tc>
-                <a:tc>
-                  <a:txBody>
-                    <a:bodyPr/>
-                    <a:lstStyle/>
-                    <a:p>
-                      <a:pPr algn="l" fontAlgn="b"/>
-                      <a:r>
-                        <a:rPr lang="de-CH" sz="1200" b="0" u="none" strike="noStrike" noProof="0" dirty="0">
-                          <a:solidFill>
-                            <a:srgbClr val="000000"/>
-                          </a:solidFill>
-                          <a:effectLst/>
-                        </a:rPr>
-                        <a:t>- Übungsblatt fertig bearbeiten</a:t>
-                      </a:r>
-                      <a:br>
-                        <a:rPr lang="de-CH" sz="1200" b="0" u="none" strike="noStrike" noProof="0" dirty="0">
-                          <a:solidFill>
-                            <a:srgbClr val="000000"/>
-                          </a:solidFill>
-                          <a:effectLst/>
-                        </a:rPr>
-                      </a:br>
-                      <a:r>
-                        <a:rPr lang="de-CH" sz="1200" b="0" u="none" strike="noStrike" noProof="0" dirty="0">
-                          <a:solidFill>
-                            <a:srgbClr val="000000"/>
-                          </a:solidFill>
-                          <a:effectLst/>
-                        </a:rPr>
-                        <a:t>- Allfällige offene Fragen via </a:t>
-                      </a:r>
-                      <a:r>
-                        <a:rPr lang="de-CH" sz="1200" b="0" u="none" strike="noStrike" noProof="0" dirty="0" err="1">
-                          <a:solidFill>
-                            <a:srgbClr val="000000"/>
-                          </a:solidFill>
-                          <a:effectLst/>
-                        </a:rPr>
-                        <a:t>Discussions</a:t>
-                      </a:r>
-                      <a:r>
-                        <a:rPr lang="de-CH" sz="1200" b="0" u="none" strike="noStrike" noProof="0" dirty="0">
-                          <a:solidFill>
-                            <a:srgbClr val="000000"/>
-                          </a:solidFill>
-                          <a:effectLst/>
-                        </a:rPr>
-                        <a:t> auf GitHub klären</a:t>
-                      </a:r>
-                      <a:endParaRPr lang="de-CH" sz="1200" b="0" i="0" u="none" strike="noStrike" noProof="0" dirty="0">
-                        <a:solidFill>
-                          <a:srgbClr val="000000"/>
-                        </a:solidFill>
-                        <a:effectLst/>
-                        <a:latin typeface="Arial" panose="020B0604020202020204" pitchFamily="34" charset="0"/>
-                      </a:endParaRPr>
-                    </a:p>
-                  </a:txBody>
-                  <a:tcPr anchor="ctr"/>
-                </a:tc>
-                <a:tc>
-                  <a:txBody>
-                    <a:bodyPr/>
-                    <a:lstStyle/>
-                    <a:p>
-                      <a:pPr algn="l" fontAlgn="b"/>
-                      <a:r>
-                        <a:rPr lang="de-CH" sz="1200" b="0" u="none" strike="noStrike" noProof="0" dirty="0">
-                          <a:solidFill>
-                            <a:srgbClr val="000000"/>
-                          </a:solidFill>
-                          <a:effectLst/>
-                        </a:rPr>
-                        <a:t>Einzeln oder in Lerngruppen (frei)</a:t>
-                      </a:r>
-                      <a:endParaRPr lang="de-CH" sz="1200" b="0" i="0" u="none" strike="noStrike" noProof="0" dirty="0">
-                        <a:solidFill>
-                          <a:srgbClr val="000000"/>
-                        </a:solidFill>
-                        <a:effectLst/>
-                        <a:latin typeface="Arial" panose="020B0604020202020204" pitchFamily="34" charset="0"/>
-                      </a:endParaRPr>
-                    </a:p>
-                  </a:txBody>
-                  <a:tcPr anchor="ctr"/>
-                </a:tc>
-                <a:tc>
-                  <a:txBody>
-                    <a:bodyPr/>
-                    <a:lstStyle/>
-                    <a:p>
-                      <a:pPr algn="l" fontAlgn="b"/>
-                      <a:r>
-                        <a:rPr lang="de-CH" sz="1200" b="0" u="none" strike="noStrike" noProof="0" dirty="0">
-                          <a:solidFill>
-                            <a:srgbClr val="000000"/>
-                          </a:solidFill>
-                          <a:effectLst/>
-                        </a:rPr>
-                        <a:t>Übungsblatt</a:t>
-                      </a:r>
-                      <a:endParaRPr lang="de-CH" sz="1200" b="0" i="0" u="none" strike="noStrike" noProof="0" dirty="0">
-                        <a:solidFill>
-                          <a:srgbClr val="000000"/>
-                        </a:solidFill>
-                        <a:effectLst/>
-                        <a:latin typeface="Arial" panose="020B0604020202020204" pitchFamily="34" charset="0"/>
-                      </a:endParaRPr>
-                    </a:p>
-                  </a:txBody>
-                  <a:tcPr anchor="ctr"/>
-                </a:tc>
-                <a:tc>
-                  <a:txBody>
-                    <a:bodyPr/>
-                    <a:lstStyle/>
-                    <a:p>
-                      <a:pPr algn="l" fontAlgn="b"/>
-                      <a:r>
-                        <a:rPr lang="de-CH" sz="1200" b="0" u="none" strike="noStrike" noProof="0" dirty="0">
-                          <a:solidFill>
-                            <a:srgbClr val="000000"/>
-                          </a:solidFill>
-                          <a:effectLst/>
-                        </a:rPr>
-                        <a:t>ca. 2 Stunden</a:t>
-                      </a:r>
-                      <a:endParaRPr lang="de-CH" sz="1200" b="0" i="0" u="none" strike="noStrike" noProof="0" dirty="0">
-                        <a:solidFill>
-                          <a:srgbClr val="000000"/>
-                        </a:solidFill>
-                        <a:effectLst/>
-                        <a:latin typeface="Arial" panose="020B0604020202020204" pitchFamily="34" charset="0"/>
-                      </a:endParaRPr>
-                    </a:p>
-                  </a:txBody>
-                  <a:tcPr anchor="ctr"/>
-                </a:tc>
-                <a:extLst>
-                  <a:ext uri="{0D108BD9-81ED-4DB2-BD59-A6C34878D82A}">
-                    <a16:rowId xmlns:a16="http://schemas.microsoft.com/office/drawing/2014/main" val="3153679734"/>
-                  </a:ext>
-                </a:extLst>
-              </a:tr>
-            </a:tbl>
-          </a:graphicData>
-        </a:graphic>
-      </p:graphicFrame>
+        </p:nvPicPr>
+        <p:blipFill>
+          <a:blip r:embed="rId2"/>
+          <a:srcRect/>
+          <a:stretch/>
+        </p:blipFill>
+        <p:spPr>
+          <a:xfrm>
+            <a:off x="595505" y="1391088"/>
+            <a:ext cx="11000990" cy="4747494"/>
+          </a:xfrm>
+          <a:prstGeom prst="rect">
+            <a:avLst/>
+          </a:prstGeom>
+        </p:spPr>
+      </p:pic>
     </p:spTree>
     <p:extLst>
       <p:ext uri="{BB962C8B-B14F-4D97-AF65-F5344CB8AC3E}">
-        <p14:creationId xmlns:p14="http://schemas.microsoft.com/office/powerpoint/2010/main" val="2603951609"/>
+        <p14:creationId xmlns:p14="http://schemas.microsoft.com/office/powerpoint/2010/main" val="3984399015"/>
       </p:ext>
     </p:extLst>
   </p:cSld>
@@ -10533,8 +9321,13 @@
             <a:pPr lvl="1"/>
             <a:r>
               <a:rPr lang="de-CH" noProof="0" dirty="0"/>
-              <a:t>Start in Semesterwoche 4 oder 5</a:t>
-            </a:r>
+              <a:t>Start in Semesterwoche </a:t>
+            </a:r>
+            <a:r>
+              <a:rPr lang="de-CH" dirty="0"/>
+              <a:t>4</a:t>
+            </a:r>
+            <a:endParaRPr lang="de-CH" noProof="0" dirty="0"/>
           </a:p>
           <a:p>
             <a:pPr lvl="2"/>
@@ -10577,7 +9370,7 @@
             <a:pPr lvl="1"/>
             <a:r>
               <a:rPr lang="de-CH" noProof="0" dirty="0"/>
-              <a:t>E-Assessment &amp; evtl. auf Papier</a:t>
+              <a:t>E-Assessment &amp; evtl. teilweise auf Papier</a:t>
             </a:r>
           </a:p>
           <a:p>
@@ -11865,6 +10658,10 @@
               <a:buChar char="-"/>
             </a:pPr>
             <a:r>
+              <a:rPr lang="de-CH" noProof="0" dirty="0"/>
+              <a:t>.</a:t>
+            </a:r>
+            <a:r>
               <a:rPr lang="de-CH" noProof="0" dirty="0" err="1"/>
               <a:t>venv</a:t>
             </a:r>
@@ -11894,13 +10691,15 @@
               </a:ext>
             </a:extLst>
           </a:blip>
-          <a:srcRect/>
-          <a:stretch/>
+          <a:srcRect r="23294" b="31124"/>
+          <a:stretch>
+            <a:fillRect/>
+          </a:stretch>
         </p:blipFill>
         <p:spPr>
           <a:xfrm>
-            <a:off x="5274019" y="1294279"/>
-            <a:ext cx="6611197" cy="3969484"/>
+            <a:off x="5274019" y="1294278"/>
+            <a:ext cx="6599223" cy="3557808"/>
           </a:xfrm>
           <a:prstGeom prst="rect">
             <a:avLst/>
@@ -15910,6 +14709,15 @@
 </file>
 
 <file path=customXml/item1.xml><?xml version="1.0" encoding="utf-8"?>
+<?mso-contentType ?>
+<FormTemplates xmlns="http://schemas.microsoft.com/sharepoint/v3/contenttype/forms">
+  <Display>DocumentLibraryForm</Display>
+  <Edit>DocumentLibraryForm</Edit>
+  <New>DocumentLibraryForm</New>
+</FormTemplates>
+</file>
+
+<file path=customXml/item2.xml><?xml version="1.0" encoding="utf-8"?>
 <ct:contentTypeSchema xmlns:ct="http://schemas.microsoft.com/office/2006/metadata/contentType" xmlns:ma="http://schemas.microsoft.com/office/2006/metadata/properties/metaAttributes" ct:_="" ma:_="" ma:contentTypeName="Dokument" ma:contentTypeID="0x0101000DF5472B98498441B4A1BAC358ABA960" ma:contentTypeVersion="17" ma:contentTypeDescription="Ein neues Dokument erstellen." ma:contentTypeScope="" ma:versionID="36a717fb42dc34690412ceb807c86fd3">
   <xsd:schema xmlns:xsd="http://www.w3.org/2001/XMLSchema" xmlns:xs="http://www.w3.org/2001/XMLSchema" xmlns:p="http://schemas.microsoft.com/office/2006/metadata/properties" xmlns:ns2="669cc249-ff44-44bd-9245-9acaabead0fc" xmlns:ns3="68628b2f-7e15-4bb9-b45d-9b408bd3f434" xmlns:ns4="a93a847e-07ec-43eb-a88c-b18616081de6" targetNamespace="http://schemas.microsoft.com/office/2006/metadata/properties" ma:root="true" ma:fieldsID="ae743aa89e72b03c3906dc9cc64e335e" ns2:_="" ns3:_="" ns4:_="">
     <xsd:import namespace="669cc249-ff44-44bd-9245-9acaabead0fc"/>
@@ -16163,7 +14971,7 @@
 </ct:contentTypeSchema>
 </file>
 
-<file path=customXml/item2.xml><?xml version="1.0" encoding="utf-8"?>
+<file path=customXml/item3.xml><?xml version="1.0" encoding="utf-8"?>
 <p:properties xmlns:p="http://schemas.microsoft.com/office/2006/metadata/properties" xmlns:xsi="http://www.w3.org/2001/XMLSchema-instance" xmlns:pc="http://schemas.microsoft.com/office/infopath/2007/PartnerControls">
   <documentManagement>
     <lcf76f155ced4ddcb4097134ff3c332f xmlns="669cc249-ff44-44bd-9245-9acaabead0fc">
@@ -16174,16 +14982,15 @@
 </p:properties>
 </file>
 
-<file path=customXml/item3.xml><?xml version="1.0" encoding="utf-8"?>
-<?mso-contentType ?>
-<FormTemplates xmlns="http://schemas.microsoft.com/sharepoint/v3/contenttype/forms">
-  <Display>DocumentLibraryForm</Display>
-  <Edit>DocumentLibraryForm</Edit>
-  <New>DocumentLibraryForm</New>
-</FormTemplates>
+<file path=customXml/itemProps1.xml><?xml version="1.0" encoding="utf-8"?>
+<ds:datastoreItem xmlns:ds="http://schemas.openxmlformats.org/officeDocument/2006/customXml" ds:itemID="{686CF15C-D95C-44C7-B312-F391FDA979A5}">
+  <ds:schemaRefs>
+    <ds:schemaRef ds:uri="http://schemas.microsoft.com/sharepoint/v3/contenttype/forms"/>
+  </ds:schemaRefs>
+</ds:datastoreItem>
 </file>
 
-<file path=customXml/itemProps1.xml><?xml version="1.0" encoding="utf-8"?>
+<file path=customXml/itemProps2.xml><?xml version="1.0" encoding="utf-8"?>
 <ds:datastoreItem xmlns:ds="http://schemas.openxmlformats.org/officeDocument/2006/customXml" ds:itemID="{FD330F7B-DCF3-4E46-BDDE-3176CFBD31D5}">
   <ds:schemaRefs>
     <ds:schemaRef ds:uri="http://schemas.microsoft.com/office/2006/metadata/contentType"/>
@@ -16203,7 +15010,7 @@
 </ds:datastoreItem>
 </file>
 
-<file path=customXml/itemProps2.xml><?xml version="1.0" encoding="utf-8"?>
+<file path=customXml/itemProps3.xml><?xml version="1.0" encoding="utf-8"?>
 <ds:datastoreItem xmlns:ds="http://schemas.openxmlformats.org/officeDocument/2006/customXml" ds:itemID="{C691F3E0-F3F9-40EA-86AD-630996158F76}">
   <ds:schemaRefs>
     <ds:schemaRef ds:uri="a93a847e-07ec-43eb-a88c-b18616081de6"/>
@@ -16219,12 +15026,4 @@
     <ds:schemaRef ds:uri="http://www.w3.org/XML/1998/namespace"/>
   </ds:schemaRefs>
 </ds:datastoreItem>
-</file>
-
-<file path=customXml/itemProps3.xml><?xml version="1.0" encoding="utf-8"?>
-<ds:datastoreItem xmlns:ds="http://schemas.openxmlformats.org/officeDocument/2006/customXml" ds:itemID="{686CF15C-D95C-44C7-B312-F391FDA979A5}">
-  <ds:schemaRefs>
-    <ds:schemaRef ds:uri="http://schemas.microsoft.com/sharepoint/v3/contenttype/forms"/>
-  </ds:schemaRefs>
-</ds:datastoreItem>
 </file>